--- a/content/source-artifacts/bagel-architecture-author-edited.pptx
+++ b/content/source-artifacts/bagel-architecture-author-edited.pptx
@@ -3910,7 +3910,7 @@
           <a:solidFill xmlns:a="http://schemas.openxmlformats.org/drawingml/2006/main">
             <a:srgbClr val="F7DEDE"/>
           </a:solidFill>
-          <a:ln xmlns:a="http://schemas.openxmlformats.org/drawingml/2006/main" w="21908">
+          <a:ln xmlns:a="http://schemas.openxmlformats.org/drawingml/2006/main" w="38100">
             <a:solidFill>
               <a:srgbClr val="111111"/>
             </a:solidFill>
